--- a/TP1_Presentation.pptx
+++ b/TP1_Presentation.pptx
@@ -123,7 +123,7 @@
   <p:extLst>
     <p:ext uri="{521415D9-36F7-43E2-AB2F-B90AF26B5E84}">
       <p14:sectionLst xmlns:p14="http://schemas.microsoft.com/office/powerpoint/2010/main">
-        <p14:section name="Introduction" id="{fd752ba7-92c3-9434-42ad-67318c06a4b0}">
+        <p14:section name="Introduction" id="{3b95a44b-aaa7-ad66-625f-fb8703f5392f}">
           <p14:sldIdLst>
             <p14:sldId id="256"/>
             <p14:sldId id="257"/>
@@ -132,70 +132,70 @@
             <p14:sldId id="260"/>
           </p14:sldIdLst>
         </p14:section>
-        <p14:section name="Introduction" id="{313730c4-efa3-0f38-d75f-75a17b11dce8}">
+        <p14:section name="Introduction" id="{9f4d1f3d-5f25-3ead-036b-ee02c1c535bd}">
           <p14:sldIdLst/>
         </p14:section>
-        <p14:section name="Introduction" id="{04c02a07-4bd4-105f-2054-51deda7c40f3}">
+        <p14:section name="Introduction" id="{2a5b3a90-f80d-d079-2e84-1e034206a55b}">
           <p14:sldIdLst/>
         </p14:section>
-        <p14:section name="Introduction" id="{f22de43e-cb4d-1071-356b-5aa6abd41d89}">
+        <p14:section name="Introduction" id="{7cb38a8d-9a7f-32f5-4e2a-8ed85ac5f245}">
           <p14:sldIdLst/>
         </p14:section>
-        <p14:section name="Introduction" id="{0cca715e-2042-1964-3f91-94fd26b43de0}">
+        <p14:section name="Introduction" id="{e6906496-df30-c0ab-9fab-057b26625493}">
           <p14:sldIdLst/>
         </p14:section>
-        <p14:section name="Partie 1" id="{176c8d2a-be87-1324-aa8e-f45b6cba248f}">
+        <p14:section name="Partie 1" id="{ac26fe99-c83c-90cb-49a6-12b747831cb4}">
           <p14:sldIdLst>
             <p14:sldId id="261"/>
           </p14:sldIdLst>
         </p14:section>
-        <p14:section name="Partie 2" id="{b939b798-c95a-5607-28df-df30e662b8c4}">
+        <p14:section name="Partie 2" id="{876ea588-92b3-2e80-b2ad-f3e47a731167}">
           <p14:sldIdLst>
             <p14:sldId id="262"/>
           </p14:sldIdLst>
         </p14:section>
-        <p14:section name="Partie 3" id="{a7b0b896-c89f-eaf4-c326-28333758329b}">
+        <p14:section name="Partie 3" id="{c83b1019-e9bb-70b9-88e5-a15014ef9a5e}">
           <p14:sldIdLst>
             <p14:sldId id="263"/>
             <p14:sldId id="264"/>
           </p14:sldIdLst>
         </p14:section>
-        <p14:section name="Partie 3" id="{c4e7ccb2-33ca-6ee9-2331-6e211356d18c}">
+        <p14:section name="Partie 3" id="{ae84f0c8-3d80-e6eb-6754-8635ff7ce93f}">
           <p14:sldIdLst/>
         </p14:section>
-        <p14:section name="Partie 4" id="{82ca4091-eaf2-1a8d-a145-013c3447b666}">
+        <p14:section name="Partie 4" id="{126092d5-160c-534e-0a95-f145f7201849}">
           <p14:sldIdLst>
             <p14:sldId id="265"/>
           </p14:sldIdLst>
         </p14:section>
-        <p14:section name="Partie 5" id="{2e20ec6d-ff59-4e67-92e2-b2d38a3b6fef}">
+        <p14:section name="Partie 5" id="{cb5c7581-aa18-72ae-7046-dc0b75bfff58}">
           <p14:sldIdLst>
             <p14:sldId id="266"/>
             <p14:sldId id="267"/>
             <p14:sldId id="268"/>
           </p14:sldIdLst>
         </p14:section>
-        <p14:section name="Partie 5" id="{ccbb02d7-6208-9afd-ff78-eb25d35293cf}">
+        <p14:section name="Partie 5" id="{1a20c930-9e79-1bce-0ab3-59fd90624a47}">
           <p14:sldIdLst/>
         </p14:section>
-        <p14:section name="Partie 5" id="{0844b824-3f2e-e50f-900f-131693609a2c}">
+        <p14:section name="Partie 5" id="{e5b5e1c4-89f8-dfe6-f064-66114b5911d8}">
           <p14:sldIdLst/>
         </p14:section>
-        <p14:section name="Partie 6" id="{6b00f8d4-8e57-255a-44b1-fde942a20c1a}">
+        <p14:section name="Partie 6" id="{bc300f29-3b9f-221e-123e-9670b11f05c6}">
           <p14:sldIdLst>
             <p14:sldId id="269"/>
             <p14:sldId id="270"/>
           </p14:sldIdLst>
         </p14:section>
-        <p14:section name="Partie 6" id="{aedf8d0b-52af-5891-464e-9d45aa647144}">
+        <p14:section name="Partie 6" id="{8fd5c5e4-6ca9-2950-e7e0-47425938eafd}">
           <p14:sldIdLst/>
         </p14:section>
-        <p14:section name="Conclusion" id="{353c084e-5bd4-3a8f-aee2-0eaf7b73b653}">
+        <p14:section name="Conclusion" id="{d8b624b7-e63e-84ea-716c-0acd30dca814}">
           <p14:sldIdLst>
             <p14:sldId id="271"/>
           </p14:sldIdLst>
         </p14:section>
-        <p14:section name="Fin" id="{4ac2b1de-5ce3-f74b-2489-1003ad042bb8}">
+        <p14:section name="Fin" id="{3f3b90d3-109e-4415-df20-faa487019b8f}">
           <p14:sldIdLst>
             <p14:sldId id="272"/>
           </p14:sldIdLst>
@@ -1308,7 +1308,7 @@
           <a:p>
             <a:r>
               <a:rPr lang="en-US" dirty="0"/>
-              <a:t>En conclusion : VirtualBox crée et gère des VM ; SSH et la redirection de port donnent un accès distant ; on vérifie l’ISO et on préfère les clés aux mots de passe ; instantané et clone ressemblent aux snapshots et aux images du cloud. Merci de votre attention, nous sommes prêts pour vos questions.</a:t>
+              <a:t>En conclusion : VirtualBox crée et gère des VM ; SSH et la redirection de port donnent un accès distant ; on vérifie l’ISO et on préfère les clés aux mots de passe ; instantané et clone ressemblent aux snapshots et aux images du cloud. Merci de votre attention, nous sommes prêts pour vos questions. Le compte rendu complet est disponible sur notre dépôt GitHub.</a:t>
             </a:r>
             <a:endParaRPr lang="en-US" dirty="0"/>
           </a:p>
@@ -6933,6 +6933,60 @@
           </a:p>
         </p:txBody>
       </p:sp>
+      <p:sp>
+        <p:nvSpPr>
+          <p:cNvPr id="13" name="lien GitHub"/>
+          <p:cNvSpPr txBox="1"/>
+          <p:nvPr/>
+        </p:nvSpPr>
+        <p:spPr>
+          <a:xfrm>
+            <a:off x="548640" y="4663440"/>
+            <a:ext cx="8046720" cy="320040"/>
+          </a:xfrm>
+          <a:prstGeom prst="rect">
+            <a:avLst/>
+          </a:prstGeom>
+          <a:noFill/>
+          <a:ln/>
+        </p:spPr>
+        <p:txBody>
+          <a:bodyPr wrap="square" lIns="0" tIns="0" rIns="0" bIns="0" rtlCol="0" anchor="ctr"/>
+          <a:lstStyle/>
+          <a:p>
+            <a:pPr indent="0" marL="0">
+              <a:buNone/>
+            </a:pPr>
+            <a:r>
+              <a:rPr lang="en-US" sz="1400" dirty="0">
+                <a:solidFill>
+                  <a:schemeClr val="bg1"/>
+                </a:solidFill>
+              </a:rPr>
+              <a:t>Compte rendu complet sur GitHub : </a:t>
+            </a:r>
+            <a:pPr indent="0" marL="0">
+              <a:buNone/>
+            </a:pPr>
+            <a:r>
+              <a:rPr lang="en-US" sz="1400" u="sng" dirty="0">
+                <a:solidFill>
+                  <a:schemeClr val="accent1"/>
+                </a:solidFill>
+                <a:hlinkClick r:id="rId1" invalidUrl="" action="" tgtFrame="" tooltip="Ouvrir TP1.md sur GitHub" history="1" highlightClick="0" endSnd="0">
+                  <a:extLst>
+                    <a:ext uri="{A12FA001-AC4F-418D-AE19-62706E023703}">
+                      <ahyp:hlinkClr xmlns:ahyp="http://schemas.microsoft.com/office/drawing/2018/hyperlinkcolor" val="tx"/>
+                    </a:ext>
+                  </a:extLst>
+                </a:hlinkClick>
+              </a:rPr>
+              <a:t>github.com/stephenz45/TP1-Cloud-VirtualBox</a:t>
+            </a:r>
+            <a:endParaRPr lang="en-US" sz="1400" dirty="0"/>
+          </a:p>
+        </p:txBody>
+      </p:sp>
     </p:spTree>
   </p:cSld>
   <p:clrMapOvr>
@@ -12655,7 +12709,7 @@
         <a:srgbClr val="C0392B"/>
       </a:accent6>
       <a:hlink>
-        <a:srgbClr val="3E7CB1"/>
+        <a:srgbClr val="7FDBD3"/>
       </a:hlink>
       <a:folHlink>
         <a:srgbClr val="8DA9C4"/>
